--- a/docs/CodeDoctor-PRISM-Theme01.pptx
+++ b/docs/CodeDoctor-PRISM-Theme01.pptx
@@ -10578,7 +10578,7 @@
                 <a:ea typeface="Calibri" pitchFamily="34" charset="-122"/>
                 <a:cs typeface="Calibri" pitchFamily="34" charset="-120"/>
               </a:rPr>
-              <a:t>snippet length — 225 tokens median, 289,002 at the tail</a:t>
+              <a:t>snippet length — 225 tokens on average, 289,002 at the tail</a:t>
             </a:r>
             <a:endParaRPr lang="en-US" sz="1200" dirty="0"/>
           </a:p>

--- a/docs/CodeDoctor-PRISM-Theme01.pptx
+++ b/docs/CodeDoctor-PRISM-Theme01.pptx
@@ -900,7 +900,7 @@
           <a:p>
             <a:r>
               <a:rPr lang="en-US" dirty="0"/>
-              <a:t>Headline: 0.96543 NDCG@10 on the CoIR AppsRetrieval test split, against 0.93756 for the frozen encoder alone. The encoder reproduces its published score, so everything above that line is this project's contribution.</a:t>
+              <a:t>Headline: 0.96558 NDCG@10 on the CoIR AppsRetrieval test split, against 0.93756 for the frozen encoder alone. The encoder reproduces its published score, so everything above that line is this project's contribution.</a:t>
             </a:r>
             <a:endParaRPr lang="en-US" dirty="0"/>
           </a:p>
@@ -2462,7 +2462,7 @@
                 <a:ea typeface="Calibri" pitchFamily="34" charset="-122"/>
                 <a:cs typeface="Calibri" pitchFamily="34" charset="-120"/>
               </a:rPr>
-              <a:t>0.96543</a:t>
+              <a:t>0.96558</a:t>
             </a:r>
             <a:endParaRPr lang="en-US" sz="5400" dirty="0"/>
           </a:p>
@@ -4698,7 +4698,7 @@
                 <a:gridCol w="1234440"/>
                 <a:gridCol w="1188720"/>
               </a:tblGrid>
-              <a:tr h="292608">
+              <a:tr h="274320">
                 <a:tc>
                   <a:txBody>
                     <a:bodyPr/>
@@ -5040,7 +5040,7 @@
                   </a:tcPr>
                 </a:tc>
               </a:tr>
-              <a:tr h="292608">
+              <a:tr h="274320">
                 <a:tc>
                   <a:txBody>
                     <a:bodyPr/>
@@ -5050,7 +5050,7 @@
                         <a:buNone/>
                       </a:pPr>
                       <a:r>
-                        <a:rPr lang="en-US" sz="1100" dirty="0">
+                        <a:rPr lang="en-US" sz="1050" dirty="0">
                           <a:solidFill>
                             <a:srgbClr val="D8E0EE"/>
                           </a:solidFill>
@@ -5060,7 +5060,7 @@
                         </a:rPr>
                         <a:t>dense only, F2LLM-v2-1.7B</a:t>
                       </a:r>
-                      <a:endParaRPr lang="en-US" sz="1100" dirty="0">
+                      <a:endParaRPr lang="en-US" sz="1050" dirty="0">
                         <a:latin typeface="Calibri" charset="0"/>
                         <a:ea typeface="Calibri" charset="0"/>
                         <a:cs typeface="Calibri" charset="0"/>
@@ -5118,7 +5118,7 @@
                         <a:buNone/>
                       </a:pPr>
                       <a:r>
-                        <a:rPr lang="en-US" sz="1100" dirty="0">
+                        <a:rPr lang="en-US" sz="1050" dirty="0">
                           <a:solidFill>
                             <a:srgbClr val="D8E0EE"/>
                           </a:solidFill>
@@ -5128,7 +5128,7 @@
                         </a:rPr>
                         <a:t>0.93756</a:t>
                       </a:r>
-                      <a:endParaRPr lang="en-US" sz="1100" dirty="0">
+                      <a:endParaRPr lang="en-US" sz="1050" dirty="0">
                         <a:latin typeface="Calibri" charset="0"/>
                         <a:ea typeface="Calibri" charset="0"/>
                         <a:cs typeface="Calibri" charset="0"/>
@@ -5186,7 +5186,7 @@
                         <a:buNone/>
                       </a:pPr>
                       <a:r>
-                        <a:rPr lang="en-US" sz="1100" dirty="0">
+                        <a:rPr lang="en-US" sz="1050" dirty="0">
                           <a:solidFill>
                             <a:srgbClr val="D8E0EE"/>
                           </a:solidFill>
@@ -5196,7 +5196,7 @@
                         </a:rPr>
                         <a:t>0.92370</a:t>
                       </a:r>
-                      <a:endParaRPr lang="en-US" sz="1100" dirty="0">
+                      <a:endParaRPr lang="en-US" sz="1050" dirty="0">
                         <a:latin typeface="Calibri" charset="0"/>
                         <a:ea typeface="Calibri" charset="0"/>
                         <a:cs typeface="Calibri" charset="0"/>
@@ -5254,7 +5254,7 @@
                         <a:buNone/>
                       </a:pPr>
                       <a:r>
-                        <a:rPr lang="en-US" sz="1100" dirty="0">
+                        <a:rPr lang="en-US" sz="1050" dirty="0">
                           <a:solidFill>
                             <a:srgbClr val="D8E0EE"/>
                           </a:solidFill>
@@ -5264,7 +5264,7 @@
                         </a:rPr>
                         <a:t>0.97955</a:t>
                       </a:r>
-                      <a:endParaRPr lang="en-US" sz="1100" dirty="0">
+                      <a:endParaRPr lang="en-US" sz="1050" dirty="0">
                         <a:latin typeface="Calibri" charset="0"/>
                         <a:ea typeface="Calibri" charset="0"/>
                         <a:cs typeface="Calibri" charset="0"/>
@@ -5322,7 +5322,7 @@
                         <a:buNone/>
                       </a:pPr>
                       <a:r>
-                        <a:rPr lang="en-US" sz="1100" dirty="0">
+                        <a:rPr lang="en-US" sz="1050" dirty="0">
                           <a:solidFill>
                             <a:srgbClr val="D8E0EE"/>
                           </a:solidFill>
@@ -5332,7 +5332,7 @@
                         </a:rPr>
                         <a:t>—</a:t>
                       </a:r>
-                      <a:endParaRPr lang="en-US" sz="1100" dirty="0">
+                      <a:endParaRPr lang="en-US" sz="1050" dirty="0">
                         <a:latin typeface="Calibri" charset="0"/>
                         <a:ea typeface="Calibri" charset="0"/>
                         <a:cs typeface="Calibri" charset="0"/>
@@ -5382,7 +5382,7 @@
                   </a:tcPr>
                 </a:tc>
               </a:tr>
-              <a:tr h="292608">
+              <a:tr h="274320">
                 <a:tc>
                   <a:txBody>
                     <a:bodyPr/>
@@ -5392,7 +5392,7 @@
                         <a:buNone/>
                       </a:pPr>
                       <a:r>
-                        <a:rPr lang="en-US" sz="1100" dirty="0">
+                        <a:rPr lang="en-US" sz="1050" dirty="0">
                           <a:solidFill>
                             <a:srgbClr val="D8E0EE"/>
                           </a:solidFill>
@@ -5402,7 +5402,7 @@
                         </a:rPr>
                         <a:t>+ execution, top-10</a:t>
                       </a:r>
-                      <a:endParaRPr lang="en-US" sz="1100" dirty="0">
+                      <a:endParaRPr lang="en-US" sz="1050" dirty="0">
                         <a:latin typeface="Calibri" charset="0"/>
                         <a:ea typeface="Calibri" charset="0"/>
                         <a:cs typeface="Calibri" charset="0"/>
@@ -5460,7 +5460,7 @@
                         <a:buNone/>
                       </a:pPr>
                       <a:r>
-                        <a:rPr lang="en-US" sz="1100" dirty="0">
+                        <a:rPr lang="en-US" sz="1050" dirty="0">
                           <a:solidFill>
                             <a:srgbClr val="D8E0EE"/>
                           </a:solidFill>
@@ -5470,7 +5470,7 @@
                         </a:rPr>
                         <a:t>0.96085</a:t>
                       </a:r>
-                      <a:endParaRPr lang="en-US" sz="1100" dirty="0">
+                      <a:endParaRPr lang="en-US" sz="1050" dirty="0">
                         <a:latin typeface="Calibri" charset="0"/>
                         <a:ea typeface="Calibri" charset="0"/>
                         <a:cs typeface="Calibri" charset="0"/>
@@ -5528,7 +5528,7 @@
                         <a:buNone/>
                       </a:pPr>
                       <a:r>
-                        <a:rPr lang="en-US" sz="1100" dirty="0">
+                        <a:rPr lang="en-US" sz="1050" dirty="0">
                           <a:solidFill>
                             <a:srgbClr val="D8E0EE"/>
                           </a:solidFill>
@@ -5538,7 +5538,7 @@
                         </a:rPr>
                         <a:t>0.95449</a:t>
                       </a:r>
-                      <a:endParaRPr lang="en-US" sz="1100" dirty="0">
+                      <a:endParaRPr lang="en-US" sz="1050" dirty="0">
                         <a:latin typeface="Calibri" charset="0"/>
                         <a:ea typeface="Calibri" charset="0"/>
                         <a:cs typeface="Calibri" charset="0"/>
@@ -5596,7 +5596,7 @@
                         <a:buNone/>
                       </a:pPr>
                       <a:r>
-                        <a:rPr lang="en-US" sz="1100" dirty="0">
+                        <a:rPr lang="en-US" sz="1050" dirty="0">
                           <a:solidFill>
                             <a:srgbClr val="D8E0EE"/>
                           </a:solidFill>
@@ -5606,7 +5606,7 @@
                         </a:rPr>
                         <a:t>0.97955</a:t>
                       </a:r>
-                      <a:endParaRPr lang="en-US" sz="1100" dirty="0">
+                      <a:endParaRPr lang="en-US" sz="1050" dirty="0">
                         <a:latin typeface="Calibri" charset="0"/>
                         <a:ea typeface="Calibri" charset="0"/>
                         <a:cs typeface="Calibri" charset="0"/>
@@ -5664,7 +5664,7 @@
                         <a:buNone/>
                       </a:pPr>
                       <a:r>
-                        <a:rPr lang="en-US" sz="1100" dirty="0">
+                        <a:rPr lang="en-US" sz="1050" dirty="0">
                           <a:solidFill>
                             <a:srgbClr val="D8E0EE"/>
                           </a:solidFill>
@@ -5674,7 +5674,7 @@
                         </a:rPr>
                         <a:t>5,839 s</a:t>
                       </a:r>
-                      <a:endParaRPr lang="en-US" sz="1100" dirty="0">
+                      <a:endParaRPr lang="en-US" sz="1050" dirty="0">
                         <a:latin typeface="Calibri" charset="0"/>
                         <a:ea typeface="Calibri" charset="0"/>
                         <a:cs typeface="Calibri" charset="0"/>
@@ -5724,7 +5724,7 @@
                   </a:tcPr>
                 </a:tc>
               </a:tr>
-              <a:tr h="292608">
+              <a:tr h="274320">
                 <a:tc>
                   <a:txBody>
                     <a:bodyPr/>
@@ -5734,17 +5734,17 @@
                         <a:buNone/>
                       </a:pPr>
                       <a:r>
-                        <a:rPr lang="en-US" sz="1100" b="1" dirty="0">
+                        <a:rPr lang="en-US" sz="1050" dirty="0">
                           <a:solidFill>
-                            <a:srgbClr val="FFFFFF"/>
+                            <a:srgbClr val="D8E0EE"/>
                           </a:solidFill>
                           <a:latin typeface="Calibri" pitchFamily="34" charset="0"/>
                           <a:ea typeface="Calibri" pitchFamily="34" charset="-122"/>
                           <a:cs typeface="Calibri" pitchFamily="34" charset="-120"/>
                         </a:rPr>
-                        <a:t>+ execution, top-20</a:t>
+                        <a:t>+ top-20, exact compare</a:t>
                       </a:r>
-                      <a:endParaRPr lang="en-US" sz="1100" dirty="0">
+                      <a:endParaRPr lang="en-US" sz="1050" dirty="0">
                         <a:latin typeface="Calibri" charset="0"/>
                         <a:ea typeface="Calibri" charset="0"/>
                         <a:cs typeface="Calibri" charset="0"/>
@@ -5802,9 +5802,9 @@
                         <a:buNone/>
                       </a:pPr>
                       <a:r>
-                        <a:rPr lang="en-US" sz="1100" b="1" dirty="0">
+                        <a:rPr lang="en-US" sz="1050" dirty="0">
                           <a:solidFill>
-                            <a:srgbClr val="5FD9C2"/>
+                            <a:srgbClr val="D8E0EE"/>
                           </a:solidFill>
                           <a:latin typeface="Calibri" pitchFamily="34" charset="0"/>
                           <a:ea typeface="Calibri" pitchFamily="34" charset="-122"/>
@@ -5812,7 +5812,7 @@
                         </a:rPr>
                         <a:t>0.96543</a:t>
                       </a:r>
-                      <a:endParaRPr lang="en-US" sz="1100" dirty="0">
+                      <a:endParaRPr lang="en-US" sz="1050" dirty="0">
                         <a:latin typeface="Calibri" charset="0"/>
                         <a:ea typeface="Calibri" charset="0"/>
                         <a:cs typeface="Calibri" charset="0"/>
@@ -5870,9 +5870,9 @@
                         <a:buNone/>
                       </a:pPr>
                       <a:r>
-                        <a:rPr lang="en-US" sz="1100" b="1" dirty="0">
+                        <a:rPr lang="en-US" sz="1050" dirty="0">
                           <a:solidFill>
-                            <a:srgbClr val="FFFFFF"/>
+                            <a:srgbClr val="D8E0EE"/>
                           </a:solidFill>
                           <a:latin typeface="Calibri" pitchFamily="34" charset="0"/>
                           <a:ea typeface="Calibri" pitchFamily="34" charset="-122"/>
@@ -5880,7 +5880,7 @@
                         </a:rPr>
                         <a:t>0.95837</a:t>
                       </a:r>
-                      <a:endParaRPr lang="en-US" sz="1100" dirty="0">
+                      <a:endParaRPr lang="en-US" sz="1050" dirty="0">
                         <a:latin typeface="Calibri" charset="0"/>
                         <a:ea typeface="Calibri" charset="0"/>
                         <a:cs typeface="Calibri" charset="0"/>
@@ -5938,9 +5938,9 @@
                         <a:buNone/>
                       </a:pPr>
                       <a:r>
-                        <a:rPr lang="en-US" sz="1100" b="1" dirty="0">
+                        <a:rPr lang="en-US" sz="1050" dirty="0">
                           <a:solidFill>
-                            <a:srgbClr val="FFFFFF"/>
+                            <a:srgbClr val="D8E0EE"/>
                           </a:solidFill>
                           <a:latin typeface="Calibri" pitchFamily="34" charset="0"/>
                           <a:ea typeface="Calibri" pitchFamily="34" charset="-122"/>
@@ -5948,7 +5948,7 @@
                         </a:rPr>
                         <a:t>0.98619</a:t>
                       </a:r>
-                      <a:endParaRPr lang="en-US" sz="1100" dirty="0">
+                      <a:endParaRPr lang="en-US" sz="1050" dirty="0">
                         <a:latin typeface="Calibri" charset="0"/>
                         <a:ea typeface="Calibri" charset="0"/>
                         <a:cs typeface="Calibri" charset="0"/>
@@ -6006,7 +6006,7 @@
                         <a:buNone/>
                       </a:pPr>
                       <a:r>
-                        <a:rPr lang="en-US" sz="1100" dirty="0">
+                        <a:rPr lang="en-US" sz="1050" dirty="0">
                           <a:solidFill>
                             <a:srgbClr val="D8E0EE"/>
                           </a:solidFill>
@@ -6016,7 +6016,349 @@
                         </a:rPr>
                         <a:t>10,686 s</a:t>
                       </a:r>
-                      <a:endParaRPr lang="en-US" sz="1100" dirty="0">
+                      <a:endParaRPr lang="en-US" sz="1050" dirty="0">
+                        <a:latin typeface="Calibri" charset="0"/>
+                        <a:ea typeface="Calibri" charset="0"/>
+                        <a:cs typeface="Calibri" charset="0"/>
+                      </a:endParaRPr>
+                    </a:p>
+                  </a:txBody>
+                  <a:tcPr marL="64008" marR="64008" marT="64008" marB="64008" anchor="ctr">
+                    <a:lnL w="6350" cap="flat" cmpd="sng" algn="ctr">
+                      <a:solidFill>
+                        <a:srgbClr val="2E3E63"/>
+                      </a:solidFill>
+                      <a:prstDash val="solid"/>
+                      <a:round/>
+                      <a:headEnd type="none" w="med" len="med"/>
+                      <a:tailEnd type="none" w="med" len="med"/>
+                    </a:lnL>
+                    <a:lnR w="6350" cap="flat" cmpd="sng" algn="ctr">
+                      <a:solidFill>
+                        <a:srgbClr val="2E3E63"/>
+                      </a:solidFill>
+                      <a:prstDash val="solid"/>
+                      <a:round/>
+                      <a:headEnd type="none" w="med" len="med"/>
+                      <a:tailEnd type="none" w="med" len="med"/>
+                    </a:lnR>
+                    <a:lnT w="6350" cap="flat" cmpd="sng" algn="ctr">
+                      <a:solidFill>
+                        <a:srgbClr val="2E3E63"/>
+                      </a:solidFill>
+                      <a:prstDash val="solid"/>
+                      <a:round/>
+                      <a:headEnd type="none" w="med" len="med"/>
+                      <a:tailEnd type="none" w="med" len="med"/>
+                    </a:lnT>
+                    <a:lnB w="6350" cap="flat" cmpd="sng" algn="ctr">
+                      <a:solidFill>
+                        <a:srgbClr val="2E3E63"/>
+                      </a:solidFill>
+                      <a:prstDash val="solid"/>
+                      <a:round/>
+                      <a:headEnd type="none" w="med" len="med"/>
+                      <a:tailEnd type="none" w="med" len="med"/>
+                    </a:lnB>
+                    <a:solidFill>
+                      <a:srgbClr val="1C2949"/>
+                    </a:solidFill>
+                  </a:tcPr>
+                </a:tc>
+              </a:tr>
+              <a:tr h="274320">
+                <a:tc>
+                  <a:txBody>
+                    <a:bodyPr/>
+                    <a:lstStyle/>
+                    <a:p>
+                      <a:pPr algn="l" indent="0" marL="0">
+                        <a:buNone/>
+                      </a:pPr>
+                      <a:r>
+                        <a:rPr lang="en-US" sz="1050" b="1" dirty="0">
+                          <a:solidFill>
+                            <a:srgbClr val="FFFFFF"/>
+                          </a:solidFill>
+                          <a:latin typeface="Calibri" pitchFamily="34" charset="0"/>
+                          <a:ea typeface="Calibri" pitchFamily="34" charset="-122"/>
+                          <a:cs typeface="Calibri" pitchFamily="34" charset="-120"/>
+                        </a:rPr>
+                        <a:t>+ numeric compare (shipped)</a:t>
+                      </a:r>
+                      <a:endParaRPr lang="en-US" sz="1050" dirty="0">
+                        <a:latin typeface="Calibri" charset="0"/>
+                        <a:ea typeface="Calibri" charset="0"/>
+                        <a:cs typeface="Calibri" charset="0"/>
+                      </a:endParaRPr>
+                    </a:p>
+                  </a:txBody>
+                  <a:tcPr marL="64008" marR="64008" marT="64008" marB="64008" anchor="ctr">
+                    <a:lnL w="6350" cap="flat" cmpd="sng" algn="ctr">
+                      <a:solidFill>
+                        <a:srgbClr val="2E3E63"/>
+                      </a:solidFill>
+                      <a:prstDash val="solid"/>
+                      <a:round/>
+                      <a:headEnd type="none" w="med" len="med"/>
+                      <a:tailEnd type="none" w="med" len="med"/>
+                    </a:lnL>
+                    <a:lnR w="6350" cap="flat" cmpd="sng" algn="ctr">
+                      <a:solidFill>
+                        <a:srgbClr val="2E3E63"/>
+                      </a:solidFill>
+                      <a:prstDash val="solid"/>
+                      <a:round/>
+                      <a:headEnd type="none" w="med" len="med"/>
+                      <a:tailEnd type="none" w="med" len="med"/>
+                    </a:lnR>
+                    <a:lnT w="6350" cap="flat" cmpd="sng" algn="ctr">
+                      <a:solidFill>
+                        <a:srgbClr val="2E3E63"/>
+                      </a:solidFill>
+                      <a:prstDash val="solid"/>
+                      <a:round/>
+                      <a:headEnd type="none" w="med" len="med"/>
+                      <a:tailEnd type="none" w="med" len="med"/>
+                    </a:lnT>
+                    <a:lnB w="6350" cap="flat" cmpd="sng" algn="ctr">
+                      <a:solidFill>
+                        <a:srgbClr val="2E3E63"/>
+                      </a:solidFill>
+                      <a:prstDash val="solid"/>
+                      <a:round/>
+                      <a:headEnd type="none" w="med" len="med"/>
+                      <a:tailEnd type="none" w="med" len="med"/>
+                    </a:lnB>
+                    <a:solidFill>
+                      <a:srgbClr val="1C2949"/>
+                    </a:solidFill>
+                  </a:tcPr>
+                </a:tc>
+                <a:tc>
+                  <a:txBody>
+                    <a:bodyPr/>
+                    <a:lstStyle/>
+                    <a:p>
+                      <a:pPr algn="l" indent="0" marL="0">
+                        <a:buNone/>
+                      </a:pPr>
+                      <a:r>
+                        <a:rPr lang="en-US" sz="1050" b="1" dirty="0">
+                          <a:solidFill>
+                            <a:srgbClr val="5FD9C2"/>
+                          </a:solidFill>
+                          <a:latin typeface="Calibri" pitchFamily="34" charset="0"/>
+                          <a:ea typeface="Calibri" pitchFamily="34" charset="-122"/>
+                          <a:cs typeface="Calibri" pitchFamily="34" charset="-120"/>
+                        </a:rPr>
+                        <a:t>0.96558</a:t>
+                      </a:r>
+                      <a:endParaRPr lang="en-US" sz="1050" dirty="0">
+                        <a:latin typeface="Calibri" charset="0"/>
+                        <a:ea typeface="Calibri" charset="0"/>
+                        <a:cs typeface="Calibri" charset="0"/>
+                      </a:endParaRPr>
+                    </a:p>
+                  </a:txBody>
+                  <a:tcPr marL="64008" marR="64008" marT="64008" marB="64008" anchor="ctr">
+                    <a:lnL w="6350" cap="flat" cmpd="sng" algn="ctr">
+                      <a:solidFill>
+                        <a:srgbClr val="2E3E63"/>
+                      </a:solidFill>
+                      <a:prstDash val="solid"/>
+                      <a:round/>
+                      <a:headEnd type="none" w="med" len="med"/>
+                      <a:tailEnd type="none" w="med" len="med"/>
+                    </a:lnL>
+                    <a:lnR w="6350" cap="flat" cmpd="sng" algn="ctr">
+                      <a:solidFill>
+                        <a:srgbClr val="2E3E63"/>
+                      </a:solidFill>
+                      <a:prstDash val="solid"/>
+                      <a:round/>
+                      <a:headEnd type="none" w="med" len="med"/>
+                      <a:tailEnd type="none" w="med" len="med"/>
+                    </a:lnR>
+                    <a:lnT w="6350" cap="flat" cmpd="sng" algn="ctr">
+                      <a:solidFill>
+                        <a:srgbClr val="2E3E63"/>
+                      </a:solidFill>
+                      <a:prstDash val="solid"/>
+                      <a:round/>
+                      <a:headEnd type="none" w="med" len="med"/>
+                      <a:tailEnd type="none" w="med" len="med"/>
+                    </a:lnT>
+                    <a:lnB w="6350" cap="flat" cmpd="sng" algn="ctr">
+                      <a:solidFill>
+                        <a:srgbClr val="2E3E63"/>
+                      </a:solidFill>
+                      <a:prstDash val="solid"/>
+                      <a:round/>
+                      <a:headEnd type="none" w="med" len="med"/>
+                      <a:tailEnd type="none" w="med" len="med"/>
+                    </a:lnB>
+                    <a:solidFill>
+                      <a:srgbClr val="1C2949"/>
+                    </a:solidFill>
+                  </a:tcPr>
+                </a:tc>
+                <a:tc>
+                  <a:txBody>
+                    <a:bodyPr/>
+                    <a:lstStyle/>
+                    <a:p>
+                      <a:pPr algn="l" indent="0" marL="0">
+                        <a:buNone/>
+                      </a:pPr>
+                      <a:r>
+                        <a:rPr lang="en-US" sz="1050" b="1" dirty="0">
+                          <a:solidFill>
+                            <a:srgbClr val="FFFFFF"/>
+                          </a:solidFill>
+                          <a:latin typeface="Calibri" pitchFamily="34" charset="0"/>
+                          <a:ea typeface="Calibri" pitchFamily="34" charset="-122"/>
+                          <a:cs typeface="Calibri" pitchFamily="34" charset="-120"/>
+                        </a:rPr>
+                        <a:t>0.95857</a:t>
+                      </a:r>
+                      <a:endParaRPr lang="en-US" sz="1050" dirty="0">
+                        <a:latin typeface="Calibri" charset="0"/>
+                        <a:ea typeface="Calibri" charset="0"/>
+                        <a:cs typeface="Calibri" charset="0"/>
+                      </a:endParaRPr>
+                    </a:p>
+                  </a:txBody>
+                  <a:tcPr marL="64008" marR="64008" marT="64008" marB="64008" anchor="ctr">
+                    <a:lnL w="6350" cap="flat" cmpd="sng" algn="ctr">
+                      <a:solidFill>
+                        <a:srgbClr val="2E3E63"/>
+                      </a:solidFill>
+                      <a:prstDash val="solid"/>
+                      <a:round/>
+                      <a:headEnd type="none" w="med" len="med"/>
+                      <a:tailEnd type="none" w="med" len="med"/>
+                    </a:lnL>
+                    <a:lnR w="6350" cap="flat" cmpd="sng" algn="ctr">
+                      <a:solidFill>
+                        <a:srgbClr val="2E3E63"/>
+                      </a:solidFill>
+                      <a:prstDash val="solid"/>
+                      <a:round/>
+                      <a:headEnd type="none" w="med" len="med"/>
+                      <a:tailEnd type="none" w="med" len="med"/>
+                    </a:lnR>
+                    <a:lnT w="6350" cap="flat" cmpd="sng" algn="ctr">
+                      <a:solidFill>
+                        <a:srgbClr val="2E3E63"/>
+                      </a:solidFill>
+                      <a:prstDash val="solid"/>
+                      <a:round/>
+                      <a:headEnd type="none" w="med" len="med"/>
+                      <a:tailEnd type="none" w="med" len="med"/>
+                    </a:lnT>
+                    <a:lnB w="6350" cap="flat" cmpd="sng" algn="ctr">
+                      <a:solidFill>
+                        <a:srgbClr val="2E3E63"/>
+                      </a:solidFill>
+                      <a:prstDash val="solid"/>
+                      <a:round/>
+                      <a:headEnd type="none" w="med" len="med"/>
+                      <a:tailEnd type="none" w="med" len="med"/>
+                    </a:lnB>
+                    <a:solidFill>
+                      <a:srgbClr val="1C2949"/>
+                    </a:solidFill>
+                  </a:tcPr>
+                </a:tc>
+                <a:tc>
+                  <a:txBody>
+                    <a:bodyPr/>
+                    <a:lstStyle/>
+                    <a:p>
+                      <a:pPr algn="l" indent="0" marL="0">
+                        <a:buNone/>
+                      </a:pPr>
+                      <a:r>
+                        <a:rPr lang="en-US" sz="1050" b="1" dirty="0">
+                          <a:solidFill>
+                            <a:srgbClr val="FFFFFF"/>
+                          </a:solidFill>
+                          <a:latin typeface="Calibri" pitchFamily="34" charset="0"/>
+                          <a:ea typeface="Calibri" pitchFamily="34" charset="-122"/>
+                          <a:cs typeface="Calibri" pitchFamily="34" charset="-120"/>
+                        </a:rPr>
+                        <a:t>0.98619</a:t>
+                      </a:r>
+                      <a:endParaRPr lang="en-US" sz="1050" dirty="0">
+                        <a:latin typeface="Calibri" charset="0"/>
+                        <a:ea typeface="Calibri" charset="0"/>
+                        <a:cs typeface="Calibri" charset="0"/>
+                      </a:endParaRPr>
+                    </a:p>
+                  </a:txBody>
+                  <a:tcPr marL="64008" marR="64008" marT="64008" marB="64008" anchor="ctr">
+                    <a:lnL w="6350" cap="flat" cmpd="sng" algn="ctr">
+                      <a:solidFill>
+                        <a:srgbClr val="2E3E63"/>
+                      </a:solidFill>
+                      <a:prstDash val="solid"/>
+                      <a:round/>
+                      <a:headEnd type="none" w="med" len="med"/>
+                      <a:tailEnd type="none" w="med" len="med"/>
+                    </a:lnL>
+                    <a:lnR w="6350" cap="flat" cmpd="sng" algn="ctr">
+                      <a:solidFill>
+                        <a:srgbClr val="2E3E63"/>
+                      </a:solidFill>
+                      <a:prstDash val="solid"/>
+                      <a:round/>
+                      <a:headEnd type="none" w="med" len="med"/>
+                      <a:tailEnd type="none" w="med" len="med"/>
+                    </a:lnR>
+                    <a:lnT w="6350" cap="flat" cmpd="sng" algn="ctr">
+                      <a:solidFill>
+                        <a:srgbClr val="2E3E63"/>
+                      </a:solidFill>
+                      <a:prstDash val="solid"/>
+                      <a:round/>
+                      <a:headEnd type="none" w="med" len="med"/>
+                      <a:tailEnd type="none" w="med" len="med"/>
+                    </a:lnT>
+                    <a:lnB w="6350" cap="flat" cmpd="sng" algn="ctr">
+                      <a:solidFill>
+                        <a:srgbClr val="2E3E63"/>
+                      </a:solidFill>
+                      <a:prstDash val="solid"/>
+                      <a:round/>
+                      <a:headEnd type="none" w="med" len="med"/>
+                      <a:tailEnd type="none" w="med" len="med"/>
+                    </a:lnB>
+                    <a:solidFill>
+                      <a:srgbClr val="1C2949"/>
+                    </a:solidFill>
+                  </a:tcPr>
+                </a:tc>
+                <a:tc>
+                  <a:txBody>
+                    <a:bodyPr/>
+                    <a:lstStyle/>
+                    <a:p>
+                      <a:pPr algn="l" indent="0" marL="0">
+                        <a:buNone/>
+                      </a:pPr>
+                      <a:r>
+                        <a:rPr lang="en-US" sz="1050" dirty="0">
+                          <a:solidFill>
+                            <a:srgbClr val="D8E0EE"/>
+                          </a:solidFill>
+                          <a:latin typeface="Calibri" pitchFamily="34" charset="0"/>
+                          <a:ea typeface="Calibri" pitchFamily="34" charset="-122"/>
+                          <a:cs typeface="Calibri" pitchFamily="34" charset="-120"/>
+                        </a:rPr>
+                        <a:t>11,920 s</a:t>
+                      </a:r>
+                      <a:endParaRPr lang="en-US" sz="1050" dirty="0">
                         <a:latin typeface="Calibri" charset="0"/>
                         <a:ea typeface="Calibri" charset="0"/>
                         <a:cs typeface="Calibri" charset="0"/>
@@ -6185,7 +6527,7 @@
         <p:spPr>
           <a:xfrm>
             <a:off x="566928" y="5504688"/>
-            <a:ext cx="2926080" cy="274320"/>
+            <a:ext cx="3840480" cy="274320"/>
           </a:xfrm>
           <a:prstGeom prst="rect">
             <a:avLst/>
@@ -6212,7 +6554,7 @@
                 <a:ea typeface="Calibri" pitchFamily="34" charset="-122"/>
                 <a:cs typeface="Calibri" pitchFamily="34" charset="-120"/>
               </a:rPr>
-              <a:t>Depth 20 was not the obvious call.</a:t>
+              <a:t>The last step is not claimed as a gain.</a:t>
             </a:r>
             <a:endParaRPr lang="en-US" sz="1250" dirty="0"/>
           </a:p>
@@ -6246,7 +6588,7 @@
               <a:buNone/>
             </a:pPr>
             <a:r>
-              <a:rPr lang="en-US" sz="1100" dirty="0">
+              <a:rPr lang="en-US" sz="1050" dirty="0">
                 <a:solidFill>
                   <a:srgbClr val="A9B7D0"/>
                 </a:solidFill>
@@ -6254,9 +6596,9 @@
                 <a:ea typeface="Calibri" pitchFamily="34" charset="-122"/>
                 <a:cs typeface="Calibri" pitchFamily="34" charset="-120"/>
               </a:rPr>
-              <a:t>On test the dense pass already reaches R@10 = 0.97955, so only 30 queries have a gold at ranks 11–20 to recover — half the headroom DEV showed. We ran both depths rather than predict. Depth 20 recovers 25 of those 30, loses 13 to false verification, nets +8 rank-1 hits. It is affordable because candidates at ranks 11–20 verify at 0.80% against 8.41% for ranks 1–10.</a:t>
-            </a:r>
-            <a:endParaRPr lang="en-US" sz="1100" dirty="0"/>
+              <a:t>Numeric comparison is +0.00015 over exact — 95% CI [−0.00046, +0.00081], p = 0.630, four queries better and three worse. It ships as the higher measured value under a more correct rule, not because the score moved. On held-out DEV the same change was +0.00468 with an interval excluding zero; it did not transfer, because after execution the test split has almost no headroom left. Depth 20 over depth 10 was the real step: 25 golds recovered from ranks 11–20 against 13 lost to false verification, +8 rank-1 hits.</a:t>
+            </a:r>
+            <a:endParaRPr lang="en-US" sz="1050" dirty="0"/>
           </a:p>
         </p:txBody>
       </p:sp>

--- a/docs/CodeDoctor-PRISM-Theme01.pptx
+++ b/docs/CodeDoctor-PRISM-Theme01.pptx
@@ -9553,7 +9553,7 @@
                 <a:ea typeface="Calibri" pitchFamily="34" charset="-122"/>
                 <a:cs typeface="Calibri" pitchFamily="34" charset="-120"/>
               </a:rPr>
-              <a:t>0 leaks across 50 randomized property trials</a:t>
+              <a:t>Bonus: retrieval across ALL versions</a:t>
             </a:r>
             <a:endParaRPr lang="en-US" sz="1350" dirty="0"/>
           </a:p>
@@ -9595,7 +9595,7 @@
                 <a:ea typeface="Calibri" pitchFamily="34" charset="-122"/>
                 <a:cs typeface="Calibri" pitchFamily="34" charset="-120"/>
               </a:rPr>
-              <a:t>Commit-pinned queries restrict candidates to that commit's tree snapshot.</a:t>
+              <a:t>retrieve_across_versions searches every version at once and groups near-identical snippets by canonical identity, so one unchanged function does not take every slot. On commander: 5 distinct snippets against 3 ungrouped.</a:t>
             </a:r>
             <a:endParaRPr lang="en-US" sz="1150" dirty="0"/>
           </a:p>
